--- a/Course Notes/Mod5_NumericalExamples.pptx
+++ b/Course Notes/Mod5_NumericalExamples.pptx
@@ -211,7 +211,7 @@
           <a:p>
             <a:fld id="{8528E9B4-49CA-4854-BDC2-2D8960612057}" type="datetimeFigureOut">
               <a:rPr lang="en-US" smtClean="0"/>
-              <a:t>1/14/2026</a:t>
+              <a:t>1/15/2026</a:t>
             </a:fld>
             <a:endParaRPr lang="en-US"/>
           </a:p>
@@ -524,6 +524,96 @@
           <a:p>
             <a:r>
               <a:rPr lang="en-US" dirty="0"/>
+              <a:t>A uniform small stiffness is added to each DOF to be a soft BC and slightly raise RBM above 0 Hz. This can help with avoiding inconsistencies with near-zero frequencies.</a:t>
+            </a:r>
+          </a:p>
+          <a:p>
+            <a:endParaRPr lang="en-US" dirty="0"/>
+          </a:p>
+        </p:txBody>
+      </p:sp>
+      <p:sp>
+        <p:nvSpPr>
+          <p:cNvPr id="4" name="Slide Number Placeholder 3"/>
+          <p:cNvSpPr>
+            <a:spLocks noGrp="1"/>
+          </p:cNvSpPr>
+          <p:nvPr>
+            <p:ph type="sldNum" sz="quarter" idx="5"/>
+          </p:nvPr>
+        </p:nvSpPr>
+        <p:spPr/>
+        <p:txBody>
+          <a:bodyPr/>
+          <a:lstStyle/>
+          <a:p>
+            <a:fld id="{227CADE5-90C9-4886-8ACA-1725E38D544C}" type="slidenum">
+              <a:rPr lang="en-US" smtClean="0"/>
+              <a:t>3</a:t>
+            </a:fld>
+            <a:endParaRPr lang="en-US"/>
+          </a:p>
+        </p:txBody>
+      </p:sp>
+    </p:spTree>
+    <p:extLst>
+      <p:ext uri="{BB962C8B-B14F-4D97-AF65-F5344CB8AC3E}">
+        <p14:creationId xmlns:p14="http://schemas.microsoft.com/office/powerpoint/2010/main" val="1016369106"/>
+      </p:ext>
+    </p:extLst>
+  </p:cSld>
+  <p:clrMapOvr>
+    <a:masterClrMapping/>
+  </p:clrMapOvr>
+</p:notes>
+</file>
+
+<file path=ppt/notesSlides/notesSlide2.xml><?xml version="1.0" encoding="utf-8"?>
+<p:notes xmlns:a="http://schemas.openxmlformats.org/drawingml/2006/main" xmlns:r="http://schemas.openxmlformats.org/officeDocument/2006/relationships" xmlns:p="http://schemas.openxmlformats.org/presentationml/2006/main">
+  <p:cSld>
+    <p:spTree>
+      <p:nvGrpSpPr>
+        <p:cNvPr id="1" name=""/>
+        <p:cNvGrpSpPr/>
+        <p:nvPr/>
+      </p:nvGrpSpPr>
+      <p:grpSpPr>
+        <a:xfrm>
+          <a:off x="0" y="0"/>
+          <a:ext cx="0" cy="0"/>
+          <a:chOff x="0" y="0"/>
+          <a:chExt cx="0" cy="0"/>
+        </a:xfrm>
+      </p:grpSpPr>
+      <p:sp>
+        <p:nvSpPr>
+          <p:cNvPr id="2" name="Slide Image Placeholder 1"/>
+          <p:cNvSpPr>
+            <a:spLocks noGrp="1" noRot="1" noChangeAspect="1"/>
+          </p:cNvSpPr>
+          <p:nvPr>
+            <p:ph type="sldImg"/>
+          </p:nvPr>
+        </p:nvSpPr>
+        <p:spPr/>
+      </p:sp>
+      <p:sp>
+        <p:nvSpPr>
+          <p:cNvPr id="3" name="Notes Placeholder 2"/>
+          <p:cNvSpPr>
+            <a:spLocks noGrp="1"/>
+          </p:cNvSpPr>
+          <p:nvPr>
+            <p:ph type="body" idx="1"/>
+          </p:nvPr>
+        </p:nvSpPr>
+        <p:spPr/>
+        <p:txBody>
+          <a:bodyPr/>
+          <a:lstStyle/>
+          <a:p>
+            <a:r>
+              <a:rPr lang="en-US" dirty="0"/>
               <a:t>17.9768299067246	18.1491193846868	0.958397441907769</a:t>
             </a:r>
           </a:p>
@@ -610,7 +700,7 @@
 </p:notes>
 </file>
 
-<file path=ppt/notesSlides/notesSlide2.xml><?xml version="1.0" encoding="utf-8"?>
+<file path=ppt/notesSlides/notesSlide3.xml><?xml version="1.0" encoding="utf-8"?>
 <p:notes xmlns:a="http://schemas.openxmlformats.org/drawingml/2006/main" xmlns:r="http://schemas.openxmlformats.org/officeDocument/2006/relationships" xmlns:p="http://schemas.openxmlformats.org/presentationml/2006/main">
   <p:cSld>
     <p:spTree>
@@ -715,7 +805,7 @@
 </p:notes>
 </file>
 
-<file path=ppt/notesSlides/notesSlide3.xml><?xml version="1.0" encoding="utf-8"?>
+<file path=ppt/notesSlides/notesSlide4.xml><?xml version="1.0" encoding="utf-8"?>
 <p:notes xmlns:a="http://schemas.openxmlformats.org/drawingml/2006/main" xmlns:r="http://schemas.openxmlformats.org/officeDocument/2006/relationships" xmlns:p="http://schemas.openxmlformats.org/presentationml/2006/main">
   <p:cSld>
     <p:spTree>
@@ -820,7 +910,7 @@
 </p:notes>
 </file>
 
-<file path=ppt/notesSlides/notesSlide4.xml><?xml version="1.0" encoding="utf-8"?>
+<file path=ppt/notesSlides/notesSlide5.xml><?xml version="1.0" encoding="utf-8"?>
 <p:notes xmlns:a="http://schemas.openxmlformats.org/drawingml/2006/main" xmlns:r="http://schemas.openxmlformats.org/officeDocument/2006/relationships" xmlns:p="http://schemas.openxmlformats.org/presentationml/2006/main">
   <p:cSld>
     <p:spTree>
@@ -925,7 +1015,7 @@
 </p:notes>
 </file>
 
-<file path=ppt/notesSlides/notesSlide5.xml><?xml version="1.0" encoding="utf-8"?>
+<file path=ppt/notesSlides/notesSlide6.xml><?xml version="1.0" encoding="utf-8"?>
 <p:notes xmlns:a="http://schemas.openxmlformats.org/drawingml/2006/main" xmlns:r="http://schemas.openxmlformats.org/officeDocument/2006/relationships" xmlns:p="http://schemas.openxmlformats.org/presentationml/2006/main">
   <p:cSld>
     <p:spTree>
@@ -1101,7 +1191,7 @@
             <a:fld id="{32B7F7EA-D5FA-48A9-A388-858D3B14DD11}" type="datetimeFigureOut">
               <a:rPr lang="en-US" smtClean="0"/>
               <a:pPr/>
-              <a:t>1/14/2026</a:t>
+              <a:t>1/15/2026</a:t>
             </a:fld>
             <a:endParaRPr lang="en-US"/>
           </a:p>
@@ -3216,7 +3306,7 @@
           <a:p>
             <a:r>
               <a:rPr lang="en-US" dirty="0"/>
-              <a:t>How Modal Truncation effects the resultant model is not obvious and depends on exactly what modes are involved and where the constraints are.</a:t>
+              <a:t>How Modal Truncation affects the resultant model is not obvious and depends on exactly what modes are involved and where the constraints are.</a:t>
             </a:r>
           </a:p>
         </p:txBody>
@@ -3796,7 +3886,7 @@
           <a:p>
             <a:r>
               <a:rPr lang="en-US" dirty="0"/>
-              <a:t>How Modal Truncation effects the resultant model is not obvious and depends on exactly what modes are involved and where the constraints are.</a:t>
+              <a:t>How Modal Truncation affects the resultant model is not obvious and depends on exactly what modes are involved and where the constraints are.</a:t>
             </a:r>
           </a:p>
         </p:txBody>
@@ -4326,7 +4416,7 @@
           <a:p>
             <a:r>
               <a:rPr lang="en-US" dirty="0"/>
-              <a:t>How Modal Truncation effects the resultant model is not obvious and depends on exactly what modes are involved and where the constraints are.</a:t>
+              <a:t>How Modal Truncation affects the resultant model is not obvious and depends on exactly what modes are involved and where the constraints are.</a:t>
             </a:r>
           </a:p>
         </p:txBody>
@@ -4670,7 +4760,7 @@
           <a:p>
             <a:r>
               <a:rPr lang="en-US" dirty="0"/>
-              <a:t>How Modal Truncation effects the resultant model is not obvious and depends on exactly what modes are involved and where the constraints are.</a:t>
+              <a:t>How Modal Truncation affects the resultant model is not obvious and depends on exactly what modes are involved and where the constraints are.</a:t>
             </a:r>
           </a:p>
         </p:txBody>
@@ -5197,7 +5287,7 @@
           <a:p>
             <a:r>
               <a:rPr lang="en-US" dirty="0"/>
-              <a:t>How Modal Truncation effects the resultant model is not obvious and depends on exactly what modes are involved and where the constraints are.</a:t>
+              <a:t>How Modal Truncation affects the resultant model is not obvious and depends on exactly what modes are involved and where the constraints are.</a:t>
             </a:r>
           </a:p>
         </p:txBody>
@@ -5246,8 +5336,8 @@
         </p:nvSpPr>
         <p:spPr>
           <a:xfrm>
-            <a:off x="4187039" y="2690336"/>
-            <a:ext cx="3817922" cy="1477328"/>
+            <a:off x="4434140" y="2551837"/>
+            <a:ext cx="3323719" cy="1754326"/>
           </a:xfrm>
           <a:prstGeom prst="rect">
             <a:avLst/>
@@ -5270,7 +5360,7 @@
             <a:pPr algn="ctr"/>
             <a:r>
               <a:rPr lang="en-US" b="1" dirty="0"/>
-              <a:t>Many modes of the subsystems are required to correctly exhibit the curvature in the truth beam modes. Truncating the modes yields a connection that is too stiff</a:t>
+              <a:t>Too many modes of the subsystems are required to correctly exhibit the curvature in the truth beam modes. Truncating the modes yields a connection that is too stiff</a:t>
             </a:r>
           </a:p>
         </p:txBody>
@@ -5330,13 +5420,8 @@
           <a:p>
             <a:r>
               <a:rPr lang="en-US" dirty="0"/>
-              <a:t>Next Up – Experimental Considerations (</a:t>
+              <a:t>Next Up – Experimental Considerations!</a:t>
             </a:r>
-            <a:r>
-              <a:rPr lang="en-US"/>
-              <a:t>after lunch)</a:t>
-            </a:r>
-            <a:endParaRPr lang="en-US" dirty="0"/>
           </a:p>
         </p:txBody>
       </p:sp>
@@ -5370,6 +5455,58 @@
           <a:chExt cx="0" cy="0"/>
         </a:xfrm>
       </p:grpSpPr>
+      <p:sp>
+        <p:nvSpPr>
+          <p:cNvPr id="6" name="Rectangle 5">
+            <a:extLst>
+              <a:ext uri="{FF2B5EF4-FFF2-40B4-BE49-F238E27FC236}">
+                <a16:creationId xmlns:a16="http://schemas.microsoft.com/office/drawing/2014/main" id="{8813B625-871C-41F0-06A4-8D81D9C6287F}"/>
+              </a:ext>
+            </a:extLst>
+          </p:cNvPr>
+          <p:cNvSpPr/>
+          <p:nvPr/>
+        </p:nvSpPr>
+        <p:spPr>
+          <a:xfrm>
+            <a:off x="6567786" y="1250134"/>
+            <a:ext cx="4572000" cy="457200"/>
+          </a:xfrm>
+          <a:prstGeom prst="rect">
+            <a:avLst/>
+          </a:prstGeom>
+          <a:solidFill>
+            <a:srgbClr val="00B050"/>
+          </a:solidFill>
+        </p:spPr>
+        <p:style>
+          <a:lnRef idx="2">
+            <a:schemeClr val="accent1">
+              <a:shade val="15000"/>
+            </a:schemeClr>
+          </a:lnRef>
+          <a:fillRef idx="1">
+            <a:schemeClr val="accent1"/>
+          </a:fillRef>
+          <a:effectRef idx="0">
+            <a:schemeClr val="accent1"/>
+          </a:effectRef>
+          <a:fontRef idx="minor">
+            <a:schemeClr val="lt1"/>
+          </a:fontRef>
+        </p:style>
+        <p:txBody>
+          <a:bodyPr rtlCol="0" anchor="ctr"/>
+          <a:lstStyle/>
+          <a:p>
+            <a:pPr algn="ctr"/>
+            <a:r>
+              <a:rPr lang="en-US" dirty="0"/>
+              <a:t>C</a:t>
+            </a:r>
+          </a:p>
+        </p:txBody>
+      </p:sp>
       <p:sp>
         <p:nvSpPr>
           <p:cNvPr id="2" name="Title 1">
@@ -5422,7 +5559,12 @@
             <p:ph idx="1"/>
           </p:nvPr>
         </p:nvSpPr>
-        <p:spPr/>
+        <p:spPr>
+          <a:xfrm>
+            <a:off x="105032" y="2093391"/>
+            <a:ext cx="11337324" cy="3897413"/>
+          </a:xfrm>
+        </p:spPr>
         <p:txBody>
           <a:bodyPr>
             <a:normAutofit/>
@@ -5431,13 +5573,14 @@
           <a:p>
             <a:r>
               <a:rPr lang="en-US" dirty="0"/>
-              <a:t>Beam A &amp; B Subsystems composed of Euler-Bernoulli Beam elements</a:t>
+              <a:t>Beam C composed of Beam A &amp; Beam B subsystems</a:t>
             </a:r>
           </a:p>
           <a:p>
+            <a:pPr lvl="1"/>
             <a:r>
               <a:rPr lang="en-US" dirty="0"/>
-              <a:t>Assemble a Truth beam by directly superimposing the matrices </a:t>
+              <a:t>Truth Answer formed by directly superimposing matrices </a:t>
             </a:r>
           </a:p>
           <a:p>
@@ -5485,6 +5628,704 @@
             <a:r>
               <a:rPr lang="en-US" dirty="0"/>
               <a:t>CMS: Modal Truncation</a:t>
+            </a:r>
+          </a:p>
+        </p:txBody>
+      </p:sp>
+      <p:sp>
+        <p:nvSpPr>
+          <p:cNvPr id="7" name="Rectangle 6">
+            <a:extLst>
+              <a:ext uri="{FF2B5EF4-FFF2-40B4-BE49-F238E27FC236}">
+                <a16:creationId xmlns:a16="http://schemas.microsoft.com/office/drawing/2014/main" id="{D9EB4019-4647-7516-9E6B-DD5C3E6AA827}"/>
+              </a:ext>
+            </a:extLst>
+          </p:cNvPr>
+          <p:cNvSpPr/>
+          <p:nvPr/>
+        </p:nvSpPr>
+        <p:spPr>
+          <a:xfrm>
+            <a:off x="574248" y="1250134"/>
+            <a:ext cx="2743200" cy="457200"/>
+          </a:xfrm>
+          <a:prstGeom prst="rect">
+            <a:avLst/>
+          </a:prstGeom>
+        </p:spPr>
+        <p:style>
+          <a:lnRef idx="2">
+            <a:schemeClr val="accent1">
+              <a:shade val="15000"/>
+            </a:schemeClr>
+          </a:lnRef>
+          <a:fillRef idx="1">
+            <a:schemeClr val="accent1"/>
+          </a:fillRef>
+          <a:effectRef idx="0">
+            <a:schemeClr val="accent1"/>
+          </a:effectRef>
+          <a:fontRef idx="minor">
+            <a:schemeClr val="lt1"/>
+          </a:fontRef>
+        </p:style>
+        <p:txBody>
+          <a:bodyPr rtlCol="0" anchor="ctr"/>
+          <a:lstStyle/>
+          <a:p>
+            <a:pPr algn="ctr"/>
+            <a:r>
+              <a:rPr lang="en-US" dirty="0"/>
+              <a:t>A</a:t>
+            </a:r>
+          </a:p>
+        </p:txBody>
+      </p:sp>
+      <p:sp>
+        <p:nvSpPr>
+          <p:cNvPr id="8" name="Rectangle 7">
+            <a:extLst>
+              <a:ext uri="{FF2B5EF4-FFF2-40B4-BE49-F238E27FC236}">
+                <a16:creationId xmlns:a16="http://schemas.microsoft.com/office/drawing/2014/main" id="{883EA3AC-A18B-24CD-91BF-9DE736CE5811}"/>
+              </a:ext>
+            </a:extLst>
+          </p:cNvPr>
+          <p:cNvSpPr/>
+          <p:nvPr/>
+        </p:nvSpPr>
+        <p:spPr>
+          <a:xfrm>
+            <a:off x="4201132" y="1250134"/>
+            <a:ext cx="1828800" cy="457200"/>
+          </a:xfrm>
+          <a:prstGeom prst="rect">
+            <a:avLst/>
+          </a:prstGeom>
+          <a:solidFill>
+            <a:schemeClr val="accent2">
+              <a:lumMod val="75000"/>
+            </a:schemeClr>
+          </a:solidFill>
+        </p:spPr>
+        <p:style>
+          <a:lnRef idx="2">
+            <a:schemeClr val="accent1">
+              <a:shade val="15000"/>
+            </a:schemeClr>
+          </a:lnRef>
+          <a:fillRef idx="1">
+            <a:schemeClr val="accent1"/>
+          </a:fillRef>
+          <a:effectRef idx="0">
+            <a:schemeClr val="accent1"/>
+          </a:effectRef>
+          <a:fontRef idx="minor">
+            <a:schemeClr val="lt1"/>
+          </a:fontRef>
+        </p:style>
+        <p:txBody>
+          <a:bodyPr rtlCol="0" anchor="ctr"/>
+          <a:lstStyle/>
+          <a:p>
+            <a:pPr algn="ctr"/>
+            <a:r>
+              <a:rPr lang="en-US" dirty="0"/>
+              <a:t>B</a:t>
+            </a:r>
+          </a:p>
+        </p:txBody>
+      </p:sp>
+      <p:sp>
+        <p:nvSpPr>
+          <p:cNvPr id="9" name="TextBox 8">
+            <a:extLst>
+              <a:ext uri="{FF2B5EF4-FFF2-40B4-BE49-F238E27FC236}">
+                <a16:creationId xmlns:a16="http://schemas.microsoft.com/office/drawing/2014/main" id="{9E6E0068-B68F-4F1D-B4C5-6AA4EA3B7AA6}"/>
+              </a:ext>
+            </a:extLst>
+          </p:cNvPr>
+          <p:cNvSpPr txBox="1"/>
+          <p:nvPr/>
+        </p:nvSpPr>
+        <p:spPr>
+          <a:xfrm>
+            <a:off x="3605193" y="1295288"/>
+            <a:ext cx="320922" cy="400110"/>
+          </a:xfrm>
+          <a:prstGeom prst="rect">
+            <a:avLst/>
+          </a:prstGeom>
+          <a:noFill/>
+        </p:spPr>
+        <p:txBody>
+          <a:bodyPr wrap="none" rtlCol="0">
+            <a:spAutoFit/>
+          </a:bodyPr>
+          <a:lstStyle/>
+          <a:p>
+            <a:r>
+              <a:rPr lang="en-US" sz="2000" b="1" dirty="0"/>
+              <a:t>+</a:t>
+            </a:r>
+          </a:p>
+        </p:txBody>
+      </p:sp>
+      <p:sp>
+        <p:nvSpPr>
+          <p:cNvPr id="10" name="Oval 9">
+            <a:extLst>
+              <a:ext uri="{FF2B5EF4-FFF2-40B4-BE49-F238E27FC236}">
+                <a16:creationId xmlns:a16="http://schemas.microsoft.com/office/drawing/2014/main" id="{DBBFAA6B-4826-9724-15E9-87E23319C117}"/>
+              </a:ext>
+            </a:extLst>
+          </p:cNvPr>
+          <p:cNvSpPr/>
+          <p:nvPr/>
+        </p:nvSpPr>
+        <p:spPr>
+          <a:xfrm>
+            <a:off x="3276147" y="1438969"/>
+            <a:ext cx="85725" cy="78530"/>
+          </a:xfrm>
+          <a:prstGeom prst="ellipse">
+            <a:avLst/>
+          </a:prstGeom>
+          <a:solidFill>
+            <a:schemeClr val="bg1"/>
+          </a:solidFill>
+          <a:ln>
+            <a:solidFill>
+              <a:schemeClr val="tx1"/>
+            </a:solidFill>
+          </a:ln>
+        </p:spPr>
+        <p:style>
+          <a:lnRef idx="2">
+            <a:schemeClr val="accent1">
+              <a:shade val="15000"/>
+            </a:schemeClr>
+          </a:lnRef>
+          <a:fillRef idx="1">
+            <a:schemeClr val="accent1"/>
+          </a:fillRef>
+          <a:effectRef idx="0">
+            <a:schemeClr val="accent1"/>
+          </a:effectRef>
+          <a:fontRef idx="minor">
+            <a:schemeClr val="lt1"/>
+          </a:fontRef>
+        </p:style>
+        <p:txBody>
+          <a:bodyPr rtlCol="0" anchor="ctr"/>
+          <a:lstStyle/>
+          <a:p>
+            <a:pPr algn="ctr"/>
+            <a:endParaRPr lang="en-US"/>
+          </a:p>
+        </p:txBody>
+      </p:sp>
+      <p:sp>
+        <p:nvSpPr>
+          <p:cNvPr id="11" name="Oval 10">
+            <a:extLst>
+              <a:ext uri="{FF2B5EF4-FFF2-40B4-BE49-F238E27FC236}">
+                <a16:creationId xmlns:a16="http://schemas.microsoft.com/office/drawing/2014/main" id="{C4517B90-41C0-2489-3E49-3C8861856E0F}"/>
+              </a:ext>
+            </a:extLst>
+          </p:cNvPr>
+          <p:cNvSpPr/>
+          <p:nvPr/>
+        </p:nvSpPr>
+        <p:spPr>
+          <a:xfrm>
+            <a:off x="4158270" y="1438969"/>
+            <a:ext cx="85725" cy="78530"/>
+          </a:xfrm>
+          <a:prstGeom prst="ellipse">
+            <a:avLst/>
+          </a:prstGeom>
+          <a:solidFill>
+            <a:schemeClr val="bg1"/>
+          </a:solidFill>
+          <a:ln>
+            <a:solidFill>
+              <a:schemeClr val="tx1"/>
+            </a:solidFill>
+          </a:ln>
+        </p:spPr>
+        <p:style>
+          <a:lnRef idx="2">
+            <a:schemeClr val="accent1">
+              <a:shade val="15000"/>
+            </a:schemeClr>
+          </a:lnRef>
+          <a:fillRef idx="1">
+            <a:schemeClr val="accent1"/>
+          </a:fillRef>
+          <a:effectRef idx="0">
+            <a:schemeClr val="accent1"/>
+          </a:effectRef>
+          <a:fontRef idx="minor">
+            <a:schemeClr val="lt1"/>
+          </a:fontRef>
+        </p:style>
+        <p:txBody>
+          <a:bodyPr rtlCol="0" anchor="ctr"/>
+          <a:lstStyle/>
+          <a:p>
+            <a:pPr algn="ctr"/>
+            <a:endParaRPr lang="en-US"/>
+          </a:p>
+        </p:txBody>
+      </p:sp>
+      <p:cxnSp>
+        <p:nvCxnSpPr>
+          <p:cNvPr id="12" name="Straight Arrow Connector 11">
+            <a:extLst>
+              <a:ext uri="{FF2B5EF4-FFF2-40B4-BE49-F238E27FC236}">
+                <a16:creationId xmlns:a16="http://schemas.microsoft.com/office/drawing/2014/main" id="{EE81D022-8DFA-0FF6-86CD-7F4E64577B13}"/>
+              </a:ext>
+            </a:extLst>
+          </p:cNvPr>
+          <p:cNvCxnSpPr>
+            <a:cxnSpLocks/>
+            <a:stCxn id="10" idx="0"/>
+          </p:cNvCxnSpPr>
+          <p:nvPr/>
+        </p:nvCxnSpPr>
+        <p:spPr>
+          <a:xfrm flipH="1" flipV="1">
+            <a:off x="3317448" y="979131"/>
+            <a:ext cx="1562" cy="459838"/>
+          </a:xfrm>
+          <a:prstGeom prst="straightConnector1">
+            <a:avLst/>
+          </a:prstGeom>
+          <a:ln w="38100">
+            <a:solidFill>
+              <a:schemeClr val="tx1">
+                <a:lumMod val="95000"/>
+                <a:lumOff val="5000"/>
+              </a:schemeClr>
+            </a:solidFill>
+            <a:tailEnd type="triangle"/>
+          </a:ln>
+        </p:spPr>
+        <p:style>
+          <a:lnRef idx="2">
+            <a:schemeClr val="accent1"/>
+          </a:lnRef>
+          <a:fillRef idx="0">
+            <a:schemeClr val="accent1"/>
+          </a:fillRef>
+          <a:effectRef idx="1">
+            <a:schemeClr val="accent1"/>
+          </a:effectRef>
+          <a:fontRef idx="minor">
+            <a:schemeClr val="tx1"/>
+          </a:fontRef>
+        </p:style>
+      </p:cxnSp>
+      <p:sp>
+        <p:nvSpPr>
+          <p:cNvPr id="13" name="Arc 12">
+            <a:extLst>
+              <a:ext uri="{FF2B5EF4-FFF2-40B4-BE49-F238E27FC236}">
+                <a16:creationId xmlns:a16="http://schemas.microsoft.com/office/drawing/2014/main" id="{660753C0-1975-2219-608F-19219BEAE3D2}"/>
+              </a:ext>
+            </a:extLst>
+          </p:cNvPr>
+          <p:cNvSpPr/>
+          <p:nvPr/>
+        </p:nvSpPr>
+        <p:spPr>
+          <a:xfrm>
+            <a:off x="3126205" y="1292798"/>
+            <a:ext cx="384048" cy="384048"/>
+          </a:xfrm>
+          <a:prstGeom prst="arc">
+            <a:avLst>
+              <a:gd name="adj1" fmla="val 17589694"/>
+              <a:gd name="adj2" fmla="val 4510709"/>
+            </a:avLst>
+          </a:prstGeom>
+          <a:ln w="38100">
+            <a:solidFill>
+              <a:schemeClr val="tx1">
+                <a:lumMod val="95000"/>
+                <a:lumOff val="5000"/>
+              </a:schemeClr>
+            </a:solidFill>
+            <a:headEnd type="triangle" w="med" len="med"/>
+            <a:tailEnd type="none" w="med" len="med"/>
+          </a:ln>
+        </p:spPr>
+        <p:style>
+          <a:lnRef idx="2">
+            <a:schemeClr val="accent1"/>
+          </a:lnRef>
+          <a:fillRef idx="0">
+            <a:schemeClr val="accent1"/>
+          </a:fillRef>
+          <a:effectRef idx="1">
+            <a:schemeClr val="accent1"/>
+          </a:effectRef>
+          <a:fontRef idx="minor">
+            <a:schemeClr val="tx1"/>
+          </a:fontRef>
+        </p:style>
+        <p:txBody>
+          <a:bodyPr rtlCol="0" anchor="ctr"/>
+          <a:lstStyle/>
+          <a:p>
+            <a:pPr algn="ctr"/>
+            <a:r>
+              <a:rPr lang="en-US" dirty="0"/>
+              <a:t>  </a:t>
+            </a:r>
+          </a:p>
+        </p:txBody>
+      </p:sp>
+      <p:cxnSp>
+        <p:nvCxnSpPr>
+          <p:cNvPr id="14" name="Straight Arrow Connector 13">
+            <a:extLst>
+              <a:ext uri="{FF2B5EF4-FFF2-40B4-BE49-F238E27FC236}">
+                <a16:creationId xmlns:a16="http://schemas.microsoft.com/office/drawing/2014/main" id="{5B4E17F0-08A5-B9A9-DA14-F9DE2AB43896}"/>
+              </a:ext>
+            </a:extLst>
+          </p:cNvPr>
+          <p:cNvCxnSpPr>
+            <a:cxnSpLocks/>
+          </p:cNvCxnSpPr>
+          <p:nvPr/>
+        </p:nvCxnSpPr>
+        <p:spPr>
+          <a:xfrm flipH="1" flipV="1">
+            <a:off x="4199571" y="979131"/>
+            <a:ext cx="1562" cy="459838"/>
+          </a:xfrm>
+          <a:prstGeom prst="straightConnector1">
+            <a:avLst/>
+          </a:prstGeom>
+          <a:ln w="38100">
+            <a:solidFill>
+              <a:schemeClr val="tx1">
+                <a:lumMod val="95000"/>
+                <a:lumOff val="5000"/>
+              </a:schemeClr>
+            </a:solidFill>
+            <a:tailEnd type="triangle"/>
+          </a:ln>
+        </p:spPr>
+        <p:style>
+          <a:lnRef idx="2">
+            <a:schemeClr val="accent1"/>
+          </a:lnRef>
+          <a:fillRef idx="0">
+            <a:schemeClr val="accent1"/>
+          </a:fillRef>
+          <a:effectRef idx="1">
+            <a:schemeClr val="accent1"/>
+          </a:effectRef>
+          <a:fontRef idx="minor">
+            <a:schemeClr val="tx1"/>
+          </a:fontRef>
+        </p:style>
+      </p:cxnSp>
+      <p:sp>
+        <p:nvSpPr>
+          <p:cNvPr id="15" name="Arc 14">
+            <a:extLst>
+              <a:ext uri="{FF2B5EF4-FFF2-40B4-BE49-F238E27FC236}">
+                <a16:creationId xmlns:a16="http://schemas.microsoft.com/office/drawing/2014/main" id="{44D03B03-13C0-534F-BA5E-AD5800B29A47}"/>
+              </a:ext>
+            </a:extLst>
+          </p:cNvPr>
+          <p:cNvSpPr/>
+          <p:nvPr/>
+        </p:nvSpPr>
+        <p:spPr>
+          <a:xfrm>
+            <a:off x="4008328" y="1292798"/>
+            <a:ext cx="384048" cy="384048"/>
+          </a:xfrm>
+          <a:prstGeom prst="arc">
+            <a:avLst>
+              <a:gd name="adj1" fmla="val 5948162"/>
+              <a:gd name="adj2" fmla="val 14938086"/>
+            </a:avLst>
+          </a:prstGeom>
+          <a:ln w="38100">
+            <a:solidFill>
+              <a:schemeClr val="tx1">
+                <a:lumMod val="95000"/>
+                <a:lumOff val="5000"/>
+              </a:schemeClr>
+            </a:solidFill>
+            <a:headEnd type="triangle" w="med" len="med"/>
+            <a:tailEnd type="none" w="med" len="med"/>
+          </a:ln>
+        </p:spPr>
+        <p:style>
+          <a:lnRef idx="2">
+            <a:schemeClr val="accent1"/>
+          </a:lnRef>
+          <a:fillRef idx="0">
+            <a:schemeClr val="accent1"/>
+          </a:fillRef>
+          <a:effectRef idx="1">
+            <a:schemeClr val="accent1"/>
+          </a:effectRef>
+          <a:fontRef idx="minor">
+            <a:schemeClr val="tx1"/>
+          </a:fontRef>
+        </p:style>
+        <p:txBody>
+          <a:bodyPr rtlCol="0" anchor="ctr"/>
+          <a:lstStyle/>
+          <a:p>
+            <a:pPr algn="ctr"/>
+            <a:r>
+              <a:rPr lang="en-US" dirty="0"/>
+              <a:t>  </a:t>
+            </a:r>
+          </a:p>
+        </p:txBody>
+      </p:sp>
+      <p:sp>
+        <p:nvSpPr>
+          <p:cNvPr id="16" name="TextBox 15">
+            <a:extLst>
+              <a:ext uri="{FF2B5EF4-FFF2-40B4-BE49-F238E27FC236}">
+                <a16:creationId xmlns:a16="http://schemas.microsoft.com/office/drawing/2014/main" id="{C1368E14-CDF2-D8C5-652A-D8A5007DD48A}"/>
+              </a:ext>
+            </a:extLst>
+          </p:cNvPr>
+          <p:cNvSpPr txBox="1"/>
+          <p:nvPr/>
+        </p:nvSpPr>
+        <p:spPr>
+          <a:xfrm>
+            <a:off x="6138398" y="1295288"/>
+            <a:ext cx="320922" cy="400110"/>
+          </a:xfrm>
+          <a:prstGeom prst="rect">
+            <a:avLst/>
+          </a:prstGeom>
+          <a:noFill/>
+        </p:spPr>
+        <p:txBody>
+          <a:bodyPr wrap="none" rtlCol="0">
+            <a:spAutoFit/>
+          </a:bodyPr>
+          <a:lstStyle/>
+          <a:p>
+            <a:r>
+              <a:rPr lang="en-US" sz="2000" b="1" dirty="0"/>
+              <a:t>=</a:t>
+            </a:r>
+          </a:p>
+        </p:txBody>
+      </p:sp>
+      <p:cxnSp>
+        <p:nvCxnSpPr>
+          <p:cNvPr id="17" name="Straight Connector 16">
+            <a:extLst>
+              <a:ext uri="{FF2B5EF4-FFF2-40B4-BE49-F238E27FC236}">
+                <a16:creationId xmlns:a16="http://schemas.microsoft.com/office/drawing/2014/main" id="{5326393A-E9A1-5314-148C-9588FB0ECB7A}"/>
+              </a:ext>
+            </a:extLst>
+          </p:cNvPr>
+          <p:cNvCxnSpPr/>
+          <p:nvPr/>
+        </p:nvCxnSpPr>
+        <p:spPr>
+          <a:xfrm>
+            <a:off x="9310986" y="1250134"/>
+            <a:ext cx="0" cy="457200"/>
+          </a:xfrm>
+          <a:prstGeom prst="line">
+            <a:avLst/>
+          </a:prstGeom>
+          <a:ln>
+            <a:solidFill>
+              <a:schemeClr val="tx1"/>
+            </a:solidFill>
+          </a:ln>
+        </p:spPr>
+        <p:style>
+          <a:lnRef idx="2">
+            <a:schemeClr val="accent1"/>
+          </a:lnRef>
+          <a:fillRef idx="0">
+            <a:schemeClr val="accent1"/>
+          </a:fillRef>
+          <a:effectRef idx="1">
+            <a:schemeClr val="accent1"/>
+          </a:effectRef>
+          <a:fontRef idx="minor">
+            <a:schemeClr val="tx1"/>
+          </a:fontRef>
+        </p:style>
+      </p:cxnSp>
+      <p:sp>
+        <p:nvSpPr>
+          <p:cNvPr id="18" name="Oval 17">
+            <a:extLst>
+              <a:ext uri="{FF2B5EF4-FFF2-40B4-BE49-F238E27FC236}">
+                <a16:creationId xmlns:a16="http://schemas.microsoft.com/office/drawing/2014/main" id="{4C7F2831-6849-27EF-1278-66E70A11598E}"/>
+              </a:ext>
+            </a:extLst>
+          </p:cNvPr>
+          <p:cNvSpPr/>
+          <p:nvPr/>
+        </p:nvSpPr>
+        <p:spPr>
+          <a:xfrm>
+            <a:off x="9266031" y="1439469"/>
+            <a:ext cx="85725" cy="78530"/>
+          </a:xfrm>
+          <a:prstGeom prst="ellipse">
+            <a:avLst/>
+          </a:prstGeom>
+          <a:solidFill>
+            <a:schemeClr val="bg1"/>
+          </a:solidFill>
+          <a:ln>
+            <a:solidFill>
+              <a:schemeClr val="tx1"/>
+            </a:solidFill>
+          </a:ln>
+        </p:spPr>
+        <p:style>
+          <a:lnRef idx="2">
+            <a:schemeClr val="accent1">
+              <a:shade val="15000"/>
+            </a:schemeClr>
+          </a:lnRef>
+          <a:fillRef idx="1">
+            <a:schemeClr val="accent1"/>
+          </a:fillRef>
+          <a:effectRef idx="0">
+            <a:schemeClr val="accent1"/>
+          </a:effectRef>
+          <a:fontRef idx="minor">
+            <a:schemeClr val="lt1"/>
+          </a:fontRef>
+        </p:style>
+        <p:txBody>
+          <a:bodyPr rtlCol="0" anchor="ctr"/>
+          <a:lstStyle/>
+          <a:p>
+            <a:pPr algn="ctr"/>
+            <a:endParaRPr lang="en-US"/>
+          </a:p>
+        </p:txBody>
+      </p:sp>
+      <p:cxnSp>
+        <p:nvCxnSpPr>
+          <p:cNvPr id="19" name="Straight Arrow Connector 18">
+            <a:extLst>
+              <a:ext uri="{FF2B5EF4-FFF2-40B4-BE49-F238E27FC236}">
+                <a16:creationId xmlns:a16="http://schemas.microsoft.com/office/drawing/2014/main" id="{4534E1C0-A9DE-694C-E028-6A34241AA48D}"/>
+              </a:ext>
+            </a:extLst>
+          </p:cNvPr>
+          <p:cNvCxnSpPr>
+            <a:cxnSpLocks/>
+          </p:cNvCxnSpPr>
+          <p:nvPr/>
+        </p:nvCxnSpPr>
+        <p:spPr>
+          <a:xfrm flipH="1" flipV="1">
+            <a:off x="9310205" y="980401"/>
+            <a:ext cx="1562" cy="459838"/>
+          </a:xfrm>
+          <a:prstGeom prst="straightConnector1">
+            <a:avLst/>
+          </a:prstGeom>
+          <a:ln w="38100">
+            <a:solidFill>
+              <a:schemeClr val="tx1">
+                <a:lumMod val="95000"/>
+                <a:lumOff val="5000"/>
+              </a:schemeClr>
+            </a:solidFill>
+            <a:tailEnd type="triangle"/>
+          </a:ln>
+        </p:spPr>
+        <p:style>
+          <a:lnRef idx="2">
+            <a:schemeClr val="accent1"/>
+          </a:lnRef>
+          <a:fillRef idx="0">
+            <a:schemeClr val="accent1"/>
+          </a:fillRef>
+          <a:effectRef idx="1">
+            <a:schemeClr val="accent1"/>
+          </a:effectRef>
+          <a:fontRef idx="minor">
+            <a:schemeClr val="tx1"/>
+          </a:fontRef>
+        </p:style>
+      </p:cxnSp>
+      <p:sp>
+        <p:nvSpPr>
+          <p:cNvPr id="20" name="Arc 19">
+            <a:extLst>
+              <a:ext uri="{FF2B5EF4-FFF2-40B4-BE49-F238E27FC236}">
+                <a16:creationId xmlns:a16="http://schemas.microsoft.com/office/drawing/2014/main" id="{2F2ED778-2D9E-CCAE-6792-4FA82A66EF50}"/>
+              </a:ext>
+            </a:extLst>
+          </p:cNvPr>
+          <p:cNvSpPr/>
+          <p:nvPr/>
+        </p:nvSpPr>
+        <p:spPr>
+          <a:xfrm>
+            <a:off x="9118962" y="1294068"/>
+            <a:ext cx="384048" cy="384048"/>
+          </a:xfrm>
+          <a:prstGeom prst="arc">
+            <a:avLst>
+              <a:gd name="adj1" fmla="val 17390596"/>
+              <a:gd name="adj2" fmla="val 4028325"/>
+            </a:avLst>
+          </a:prstGeom>
+          <a:ln w="38100">
+            <a:solidFill>
+              <a:schemeClr val="tx1">
+                <a:lumMod val="95000"/>
+                <a:lumOff val="5000"/>
+              </a:schemeClr>
+            </a:solidFill>
+            <a:headEnd type="triangle" w="med" len="med"/>
+            <a:tailEnd type="none" w="med" len="med"/>
+          </a:ln>
+        </p:spPr>
+        <p:style>
+          <a:lnRef idx="2">
+            <a:schemeClr val="accent1"/>
+          </a:lnRef>
+          <a:fillRef idx="0">
+            <a:schemeClr val="accent1"/>
+          </a:fillRef>
+          <a:effectRef idx="1">
+            <a:schemeClr val="accent1"/>
+          </a:effectRef>
+          <a:fontRef idx="minor">
+            <a:schemeClr val="tx1"/>
+          </a:fontRef>
+        </p:style>
+        <p:txBody>
+          <a:bodyPr rtlCol="0" anchor="ctr"/>
+          <a:lstStyle/>
+          <a:p>
+            <a:pPr algn="ctr"/>
+            <a:r>
+              <a:rPr lang="en-US" dirty="0"/>
+              <a:t>  </a:t>
             </a:r>
           </a:p>
         </p:txBody>
@@ -5550,13 +6391,13 @@
             <a:pPr algn="ctr"/>
             <a:r>
               <a:rPr lang="en-US" dirty="0"/>
-              <a:t>Beam Subsystems A &amp; B</a:t>
+              <a:t>Section 1 &amp; 2 : Beam Subsystems A &amp; B</a:t>
             </a:r>
           </a:p>
         </p:txBody>
       </p:sp>
-      <mc:AlternateContent xmlns:mc="http://schemas.openxmlformats.org/markup-compatibility/2006" xmlns:a14="http://schemas.microsoft.com/office/drawing/2010/main">
-        <mc:Choice Requires="a14">
+      <mc:AlternateContent xmlns:mc="http://schemas.openxmlformats.org/markup-compatibility/2006">
+        <mc:Choice xmlns:a14="http://schemas.microsoft.com/office/drawing/2010/main" Requires="a14">
           <p:sp>
             <p:nvSpPr>
               <p:cNvPr id="3" name="Content Placeholder 2">
@@ -5575,8 +6416,8 @@
             </p:nvSpPr>
             <p:spPr>
               <a:xfrm>
-                <a:off x="105032" y="1938378"/>
-                <a:ext cx="11337324" cy="4022156"/>
+                <a:off x="105032" y="2095837"/>
+                <a:ext cx="11337324" cy="3943012"/>
               </a:xfrm>
             </p:spPr>
             <p:txBody>
@@ -5643,66 +6484,33 @@
                 </a:r>
                 <a:r>
                   <a:rPr lang="en-US" dirty="0"/>
-                  <a:t> generates Mass, M, and Stiffness, K, matrices. The damping matrix, C, is then constructed proportional to M &amp; K.</a:t>
+                  <a:t> generates Mass, M, and Stiffness, K, matrices composed of Euler-Bernoulli Beam elements. The damping matrix, C, is then constructed proportional to M &amp; K.</a:t>
                 </a:r>
               </a:p>
               <a:p>
                 <a:r>
                   <a:rPr lang="en-US" dirty="0"/>
-                  <a:t>Boundary Conditions: </a:t>
-                </a:r>
-              </a:p>
-              <a:p>
-                <a:pPr lvl="1"/>
-                <a:r>
-                  <a:rPr lang="en-US" dirty="0"/>
-                  <a:t>A uniform small stiffness is added to each DOF to be a soft BC and slightly raise RBM above 0 Hz. This can help with avoiding inconsistencies with near-zero RBM </a:t>
+                  <a:t>Boundary Conditions </a:t>
                 </a:r>
                 <a14:m>
                   <m:oMath xmlns:m="http://schemas.openxmlformats.org/officeDocument/2006/math">
-                    <m:sSub>
-                      <m:sSubPr>
-                        <m:ctrlPr>
-                          <a:rPr lang="en-US" b="0" i="1" smtClean="0">
-                            <a:latin typeface="Cambria Math" panose="02040503050406030204" pitchFamily="18" charset="0"/>
-                          </a:rPr>
-                        </m:ctrlPr>
-                      </m:sSubPr>
-                      <m:e>
-                        <m:r>
-                          <a:rPr lang="en-US" b="0" i="1" smtClean="0">
-                            <a:latin typeface="Cambria Math" panose="02040503050406030204" pitchFamily="18" charset="0"/>
-                          </a:rPr>
-                          <m:t>𝜔</m:t>
-                        </m:r>
-                      </m:e>
-                      <m:sub>
-                        <m:r>
-                          <a:rPr lang="en-US" b="0" i="1" smtClean="0">
-                            <a:latin typeface="Cambria Math" panose="02040503050406030204" pitchFamily="18" charset="0"/>
-                          </a:rPr>
-                          <m:t>𝑛</m:t>
-                        </m:r>
-                      </m:sub>
-                    </m:sSub>
+                    <m:r>
+                      <a:rPr lang="en-US" b="0" i="1" smtClean="0">
+                        <a:latin typeface="Cambria Math" panose="02040503050406030204" pitchFamily="18" charset="0"/>
+                      </a:rPr>
+                      <m:t>→</m:t>
+                    </m:r>
                   </m:oMath>
                 </a14:m>
                 <a:r>
                   <a:rPr lang="en-US" dirty="0"/>
-                  <a:t>.</a:t>
-                </a:r>
-              </a:p>
-              <a:p>
-                <a:pPr lvl="1"/>
-                <a:r>
-                  <a:rPr lang="en-US" dirty="0"/>
-                  <a:t>Define a cantilever or fixed-fixed beam by fixing one or both of the outer beam ends</a:t>
+                  <a:t> Define a cantilever or fixed-fixed beam by fixing one or both of the outer beam ends</a:t>
                 </a:r>
               </a:p>
             </p:txBody>
           </p:sp>
         </mc:Choice>
-        <mc:Fallback xmlns="">
+        <mc:Fallback>
           <p:sp>
             <p:nvSpPr>
               <p:cNvPr id="3" name="Content Placeholder 2">
@@ -5721,13 +6529,13 @@
             </p:nvSpPr>
             <p:spPr>
               <a:xfrm>
-                <a:off x="105032" y="1938378"/>
-                <a:ext cx="11337324" cy="4022156"/>
+                <a:off x="105032" y="2095837"/>
+                <a:ext cx="11337324" cy="3943012"/>
               </a:xfrm>
               <a:blipFill>
-                <a:blip r:embed="rId2"/>
+                <a:blip r:embed="rId3"/>
                 <a:stretch>
-                  <a:fillRect l="-968" t="-2727" r="-1290" b="-303"/>
+                  <a:fillRect l="-968" t="-2782" r="-1129"/>
                 </a:stretch>
               </a:blipFill>
             </p:spPr>
@@ -6739,14 +7547,14 @@
         </p:spPr>
         <p:txBody>
           <a:bodyPr>
-            <a:normAutofit fontScale="90000"/>
+            <a:noAutofit/>
           </a:bodyPr>
           <a:lstStyle/>
           <a:p>
             <a:pPr algn="ctr"/>
             <a:r>
-              <a:rPr lang="en-US" dirty="0"/>
-              <a:t>Truth Assembly By Superimposing Matrices</a:t>
+              <a:rPr lang="en-US" sz="3600" dirty="0"/>
+              <a:t>Section 1 &amp; 2 : Truth Assembly By Superimposing Matrices</a:t>
             </a:r>
           </a:p>
         </p:txBody>
@@ -9295,7 +10103,7 @@
             <a:pPr algn="ctr"/>
             <a:r>
               <a:rPr lang="en-US" dirty="0"/>
-              <a:t>Physical Substructuring</a:t>
+              <a:t>Section 3: Physical Substructuring</a:t>
             </a:r>
           </a:p>
         </p:txBody>
@@ -9320,8 +10128,8 @@
             </p:nvSpPr>
             <p:spPr>
               <a:xfrm>
-                <a:off x="105031" y="1938970"/>
-                <a:ext cx="11938801" cy="2312151"/>
+                <a:off x="67223" y="1938970"/>
+                <a:ext cx="12002047" cy="2312151"/>
               </a:xfrm>
             </p:spPr>
             <p:txBody>
@@ -9330,9 +10138,12 @@
               </a:bodyPr>
               <a:lstStyle/>
               <a:p>
+                <a:pPr marL="0" indent="0">
+                  <a:buNone/>
+                </a:pPr>
                 <a:r>
                   <a:rPr lang="en-US" sz="3000" dirty="0"/>
-                  <a:t>Form the Signed Boolean Matrix, </a:t>
+                  <a:t>Q1: Form the Signed Boolean Matrix, </a:t>
                 </a:r>
                 <a14:m>
                   <m:oMath xmlns:m="http://schemas.openxmlformats.org/officeDocument/2006/math">
@@ -9350,9 +10161,12 @@
                 </a:r>
               </a:p>
               <a:p>
+                <a:pPr marL="0" indent="0">
+                  <a:buNone/>
+                </a:pPr>
                 <a:r>
                   <a:rPr lang="en-US" sz="3000" dirty="0"/>
-                  <a:t>For Primal Assembly, generate the Localization Matrix, </a:t>
+                  <a:t>Q2: For Primal Assembly, generate the Localization Matrix, </a:t>
                 </a:r>
                 <a14:m>
                   <m:oMath xmlns:m="http://schemas.openxmlformats.org/officeDocument/2006/math">
@@ -9381,9 +10195,12 @@
                 <a:endParaRPr lang="en-US" sz="3000" dirty="0"/>
               </a:p>
               <a:p>
+                <a:pPr marL="0" indent="0">
+                  <a:buNone/>
+                </a:pPr>
                 <a:r>
                   <a:rPr lang="en-US" sz="3000" dirty="0"/>
-                  <a:t>Compute the Coupled System M, C &amp; K matrices and the associated modal parameters </a:t>
+                  <a:t>Q3: Compute the Coupled System M, C &amp; K matrices and associated modal parameters </a:t>
                 </a:r>
               </a:p>
               <a:p>
@@ -9420,13 +10237,13 @@
             </p:nvSpPr>
             <p:spPr>
               <a:xfrm>
-                <a:off x="105031" y="1938970"/>
-                <a:ext cx="11938801" cy="2312151"/>
+                <a:off x="67223" y="1938970"/>
+                <a:ext cx="12002047" cy="2312151"/>
               </a:xfrm>
               <a:blipFill>
                 <a:blip r:embed="rId2"/>
                 <a:stretch>
-                  <a:fillRect l="-766" t="-5277" r="-1378" b="-1847"/>
+                  <a:fillRect l="-914" t="-5277" b="-1847"/>
                 </a:stretch>
               </a:blipFill>
             </p:spPr>
@@ -13414,13 +14231,13 @@
             <a:pPr algn="ctr"/>
             <a:r>
               <a:rPr lang="en-US" dirty="0"/>
-              <a:t>Frequency Based Substructuring</a:t>
+              <a:t>Section 4: Frequency Based Substructuring</a:t>
             </a:r>
           </a:p>
         </p:txBody>
       </p:sp>
-      <mc:AlternateContent xmlns:mc="http://schemas.openxmlformats.org/markup-compatibility/2006" xmlns:a14="http://schemas.microsoft.com/office/drawing/2010/main">
-        <mc:Choice Requires="a14">
+      <mc:AlternateContent xmlns:mc="http://schemas.openxmlformats.org/markup-compatibility/2006">
+        <mc:Choice xmlns:a14="http://schemas.microsoft.com/office/drawing/2010/main" Requires="a14">
           <p:sp>
             <p:nvSpPr>
               <p:cNvPr id="3" name="Content Placeholder 2">
@@ -13439,8 +14256,8 @@
             </p:nvSpPr>
             <p:spPr>
               <a:xfrm>
-                <a:off x="105032" y="1938970"/>
-                <a:ext cx="11337324" cy="4203599"/>
+                <a:off x="105031" y="1938970"/>
+                <a:ext cx="11640557" cy="4203599"/>
               </a:xfrm>
             </p:spPr>
             <p:txBody>
@@ -13449,9 +14266,12 @@
               </a:bodyPr>
               <a:lstStyle/>
               <a:p>
+                <a:pPr marL="0" indent="0">
+                  <a:buNone/>
+                </a:pPr>
                 <a:r>
                   <a:rPr lang="en-US" dirty="0"/>
-                  <a:t>Form the Reference and Response Signed Boolean Matrices, </a:t>
+                  <a:t>Q1: Form the Reference and Response Signed Boolean Matrices, </a:t>
                 </a:r>
                 <a14:m>
                   <m:oMath xmlns:m="http://schemas.openxmlformats.org/officeDocument/2006/math">
@@ -13516,9 +14336,12 @@
                 <a:endParaRPr lang="en-US" dirty="0"/>
               </a:p>
               <a:p>
+                <a:pPr marL="0" indent="0">
+                  <a:buNone/>
+                </a:pPr>
                 <a:r>
                   <a:rPr lang="en-US" dirty="0"/>
-                  <a:t>Implement the LM-FBS assembly equation:</a:t>
+                  <a:t>Q2: Implement the LM-FBS assembly equation:</a:t>
                 </a:r>
               </a:p>
               <a:p>
@@ -14180,9 +15003,12 @@
                 <a:endParaRPr lang="en-US" sz="2400" dirty="0"/>
               </a:p>
               <a:p>
+                <a:pPr marL="0" indent="0">
+                  <a:buNone/>
+                </a:pPr>
                 <a:r>
                   <a:rPr lang="en-US" dirty="0"/>
-                  <a:t>What happens as you add noise to the FRFs?</a:t>
+                  <a:t>Q3: What happens as you add noise to the FRFs?</a:t>
                 </a:r>
               </a:p>
               <a:p>
@@ -14210,7 +15036,7 @@
             </p:txBody>
           </p:sp>
         </mc:Choice>
-        <mc:Fallback xmlns="">
+        <mc:Fallback>
           <p:sp>
             <p:nvSpPr>
               <p:cNvPr id="3" name="Content Placeholder 2">
@@ -14229,13 +15055,13 @@
             </p:nvSpPr>
             <p:spPr>
               <a:xfrm>
-                <a:off x="105032" y="1938970"/>
-                <a:ext cx="11337324" cy="4203599"/>
+                <a:off x="105031" y="1938970"/>
+                <a:ext cx="11640557" cy="4203599"/>
               </a:xfrm>
               <a:blipFill>
                 <a:blip r:embed="rId2"/>
                 <a:stretch>
-                  <a:fillRect l="-968" t="-2029"/>
+                  <a:fillRect l="-1047" t="-2029"/>
                 </a:stretch>
               </a:blipFill>
             </p:spPr>
@@ -15678,7 +16504,7 @@
             <a:pPr algn="ctr"/>
             <a:r>
               <a:rPr lang="en-US" dirty="0"/>
-              <a:t>Component Mode Synthesis</a:t>
+              <a:t>Section 5: Component Mode Synthesis</a:t>
             </a:r>
           </a:p>
         </p:txBody>
@@ -15702,7 +16528,7 @@
         <p:spPr>
           <a:xfrm>
             <a:off x="105032" y="1938970"/>
-            <a:ext cx="11337324" cy="2611954"/>
+            <a:ext cx="11911642" cy="2611954"/>
           </a:xfrm>
         </p:spPr>
         <p:txBody>
@@ -15711,13 +16537,23 @@
           </a:bodyPr>
           <a:lstStyle/>
           <a:p>
+            <a:pPr marL="0" indent="0">
+              <a:buNone/>
+            </a:pPr>
             <a:r>
               <a:rPr lang="en-US" dirty="0">
                 <a:solidFill>
                   <a:schemeClr val="accent1"/>
                 </a:solidFill>
               </a:rPr>
-              <a:t>Compile the modal system matrices and construct the modal constraint matrix</a:t>
+              <a:t>Q1,2,3: Compile the modal system matrices and construct the modal constraint matrix</a:t>
+            </a:r>
+          </a:p>
+          <a:p>
+            <a:pPr lvl="1"/>
+            <a:r>
+              <a:rPr lang="en-US" dirty="0"/>
+              <a:t>Hint: the process is very similar to what you just did for the physical substructuring case</a:t>
             </a:r>
           </a:p>
           <a:p>
@@ -15727,25 +16563,13 @@
             </a:r>
           </a:p>
           <a:p>
-            <a:pPr lvl="1"/>
-            <a:r>
-              <a:rPr lang="en-US" dirty="0"/>
-              <a:t>Hint: the setup is very similar to what you just did for the physical substructuring case</a:t>
-            </a:r>
-            <a:endParaRPr lang="en-US" dirty="0">
-              <a:solidFill>
-                <a:schemeClr val="accent1"/>
-              </a:solidFill>
-            </a:endParaRPr>
-          </a:p>
-          <a:p>
             <a:r>
               <a:rPr lang="en-US" dirty="0">
                 <a:solidFill>
                   <a:schemeClr val="accent1"/>
                 </a:solidFill>
               </a:rPr>
-              <a:t>How does Modal Truncation effect the result? </a:t>
+              <a:t>How does Modal Truncation affect the result? </a:t>
             </a:r>
           </a:p>
           <a:p>
